--- a/docs/deck/CALIPER_UniHack.pptx
+++ b/docs/deck/CALIPER_UniHack.pptx
@@ -4459,7 +4459,7 @@
                 </a:solidFill>
                 <a:latin typeface="Courier New"/>
               </a:rPr>
-              <a:t>26,492</a:t>
+              <a:t>26,627</a:t>
             </a:r>
           </a:p>
         </p:txBody>
@@ -6631,7 +6631,7 @@
                 </a:solidFill>
                 <a:latin typeface="Calibri"/>
               </a:rPr>
-              <a:t>26,492 cells, each traceable to the rule that made it and the characters behind it.</a:t>
+              <a:t>26,627 cells, each traceable to the rule that made it and the characters behind it.</a:t>
             </a:r>
           </a:p>
         </p:txBody>
